--- a/DataSprint2026_Presentation.pptx
+++ b/DataSprint2026_Presentation.pptx
@@ -11,6 +11,7 @@
     <p:sldId id="259" r:id="rId5"/>
     <p:sldId id="260" r:id="rId6"/>
     <p:sldId id="261" r:id="rId7"/>
+    <p:sldId id="263" r:id="rId14"/>
     <p:sldId id="262" r:id="rId8"/>
   </p:sldIdLst>
   <p:notesMasterIdLst>
@@ -419,6 +420,30 @@
             <a:effectLst/>
           </c:spPr>
           <c:invertIfNegative val="0"/>
+          <c:dPt>
+            <c:idx val="3"/>
+            <c:spPr>
+              <a:solidFill>
+                <a:srgbClr val="6E8BC9"/>
+              </a:solidFill>
+            </c:spPr>
+          </c:dPt>
+          <c:dPt>
+            <c:idx val="4"/>
+            <c:spPr>
+              <a:solidFill>
+                <a:srgbClr val="6E8BC9"/>
+              </a:solidFill>
+            </c:spPr>
+          </c:dPt>
+          <c:dPt>
+            <c:idx val="5"/>
+            <c:spPr>
+              <a:solidFill>
+                <a:srgbClr val="27AE60"/>
+              </a:solidFill>
+            </c:spPr>
+          </c:dPt>
           <c:dLbls>
             <c:numFmt formatCode="#,##0" sourceLinked="0"/>
             <c:txPr>
@@ -460,7 +485,7 @@
             <c:bubble3D val="0"/>
             <c:spPr>
               <a:solidFill>
-                <a:srgbClr val="6B8CC7"/>
+                <a:srgbClr val="6E8BC9"/>
               </a:solidFill>
               <a:effectLst/>
             </c:spPr>
@@ -471,44 +496,60 @@
             <c:bubble3D val="0"/>
             <c:spPr>
               <a:solidFill>
-                <a:srgbClr val="27AE60"/>
+                <a:srgbClr val="6E8BC9"/>
               </a:solidFill>
               <a:effectLst/>
             </c:spPr>
           </c:dPt>
           <c:cat>
-            <c:multiLvlStrRef>
-              <c:f>Sheet1!$A$2:$A$4</c:f>
-              <c:multiLvlStrCache>
-                <c:ptCount val="3"/>
-                <c:lvl>
-                  <c:pt idx="0">
-                    <c:v>LR baseline</c:v>
-                  </c:pt>
-                  <c:pt idx="1">
-                    <c:v>LR tuned</c:v>
-                  </c:pt>
-                  <c:pt idx="2">
-                    <c:v>RF tuned</c:v>
-                  </c:pt>
-                </c:lvl>
-              </c:multiLvlStrCache>
-            </c:multiLvlStrRef>
+            <c:strRef>
+              <c:f>Sheet1!$A$2:$A$7</c:f>
+              <c:strCache>
+                <c:ptCount val="6"/>
+                <c:pt idx="0">
+                  <c:v>LR</c:v>
+                </c:pt>
+                <c:pt idx="1">
+                  <c:v>RF</c:v>
+                </c:pt>
+                <c:pt idx="2">
+                  <c:v>LGBM</c:v>
+                </c:pt>
+                <c:pt idx="3">
+                  <c:v>RF+SM</c:v>
+                </c:pt>
+                <c:pt idx="4">
+                  <c:v>LGBM+SM</c:v>
+                </c:pt>
+                <c:pt idx="5">
+                  <c:v>Final</c:v>
+                </c:pt>
+              </c:strCache>
+            </c:strRef>
           </c:cat>
           <c:val>
             <c:numRef>
-              <c:f>Sheet1!$B$2:$B$4</c:f>
+              <c:f>Sheet1!$B$2:$B$7</c:f>
               <c:numCache>
-                <c:formatCode>General</c:formatCode>
-                <c:ptCount val="3"/>
+                <c:formatCode>0.000</c:formatCode>
+                <c:ptCount val="6"/>
                 <c:pt idx="0">
-                  <c:v>0.5</c:v>
+                  <c:v>0.5145</c:v>
                 </c:pt>
                 <c:pt idx="1">
-                  <c:v>0.514</c:v>
+                  <c:v>0.5379</c:v>
                 </c:pt>
                 <c:pt idx="2">
-                  <c:v>0.54</c:v>
+                  <c:v>0.5273</c:v>
+                </c:pt>
+                <c:pt idx="3">
+                  <c:v>0.5313</c:v>
+                </c:pt>
+                <c:pt idx="4">
+                  <c:v>0.5414</c:v>
+                </c:pt>
+                <c:pt idx="5">
+                  <c:v>0.5424</c:v>
                 </c:pt>
               </c:numCache>
             </c:numRef>
@@ -569,7 +610,7 @@
           <a:lstStyle/>
           <a:p>
             <a:pPr>
-              <a:defRPr sz="1200" b="0" i="0" u="none" strike="noStrike">
+              <a:defRPr sz="800" b="0" i="0" u="none" strike="noStrike">
                 <a:solidFill>
                   <a:srgbClr val="CADCFC"/>
                 </a:solidFill>
@@ -589,8 +630,8 @@
         <c:axId val="2094734552"/>
         <c:scaling>
           <c:orientation val="minMax"/>
-          <c:max val="0.6"/>
-          <c:min val="0.45"/>
+          <c:max val="0.55"/>
+          <c:min val="0.5"/>
         </c:scaling>
         <c:delete val="0"/>
         <c:axPos val="l"/>
@@ -605,7 +646,7 @@
             </a:ln>
           </c:spPr>
         </c:majorGridlines>
-        <c:numFmt formatCode="General" sourceLinked="0"/>
+        <c:numFmt formatCode="0.00" sourceLinked="0"/>
         <c:majorTickMark val="out"/>
         <c:minorTickMark val="none"/>
         <c:tickLblPos val="nextTo"/>
@@ -636,6 +677,7 @@
         <c:crossAx val="2094734554"/>
         <c:crosses val="autoZero"/>
         <c:crossBetween val="between"/>
+        <c:majorUnit val="0.01"/>
       </c:valAx>
       <c:spPr>
         <a:noFill/>
@@ -726,7 +768,7 @@
             <c:bubble3D val="0"/>
             <c:spPr>
               <a:solidFill>
-                <a:srgbClr val="64748B"/>
+                <a:srgbClr val="94A3B8"/>
               </a:solidFill>
               <a:effectLst/>
             </c:spPr>
@@ -737,7 +779,7 @@
             <c:bubble3D val="0"/>
             <c:spPr>
               <a:solidFill>
-                <a:srgbClr val="64748B"/>
+                <a:srgbClr val="94A3B8"/>
               </a:solidFill>
               <a:effectLst/>
             </c:spPr>
@@ -748,7 +790,7 @@
             <c:bubble3D val="0"/>
             <c:spPr>
               <a:solidFill>
-                <a:srgbClr val="4A90D9"/>
+                <a:srgbClr val="64748B"/>
               </a:solidFill>
               <a:effectLst/>
             </c:spPr>
@@ -787,56 +829,54 @@
             </c:spPr>
           </c:dPt>
           <c:cat>
-            <c:multiLvlStrRef>
+            <c:strRef>
               <c:f>Sheet1!$A$2:$A$7</c:f>
-              <c:multiLvlStrCache>
+              <c:strCache>
                 <c:ptCount val="6"/>
-                <c:lvl>
-                  <c:pt idx="0">
-                    <c:v>prodsum1</c:v>
-                  </c:pt>
-                  <c:pt idx="1">
-                    <c:v>monthly_income</c:v>
-                  </c:pt>
-                  <c:pt idx="2">
-                    <c:v>has_any_savings</c:v>
-                  </c:pt>
-                  <c:pt idx="3">
-                    <c:v>fully_excluded</c:v>
-                  </c:pt>
-                  <c:pt idx="4">
-                    <c:v>shock_no_savings</c:v>
-                  </c:pt>
-                  <c:pt idx="5">
-                    <c:v>financial_health_score</c:v>
-                  </c:pt>
-                </c:lvl>
-              </c:multiLvlStrCache>
-            </c:multiLvlStrRef>
+                <c:pt idx="0">
+                  <c:v>No debt stress (3 mo)</c:v>
+                </c:pt>
+                <c:pt idx="1">
+                  <c:v>Can access emergency funds</c:v>
+                </c:pt>
+                <c:pt idx="2">
+                  <c:v>Financial health score</c:v>
+                </c:pt>
+                <c:pt idx="3">
+                  <c:v>Monthly income</c:v>
+                </c:pt>
+                <c:pt idx="4">
+                  <c:v>Age group</c:v>
+                </c:pt>
+                <c:pt idx="5">
+                  <c:v>County</c:v>
+                </c:pt>
+              </c:strCache>
+            </c:strRef>
           </c:cat>
           <c:val>
             <c:numRef>
               <c:f>Sheet1!$B$2:$B$7</c:f>
               <c:numCache>
-                <c:formatCode>General</c:formatCode>
+                <c:formatCode>0.000</c:formatCode>
                 <c:ptCount val="6"/>
                 <c:pt idx="0">
-                  <c:v>320</c:v>
+                  <c:v>0.00755</c:v>
                 </c:pt>
                 <c:pt idx="1">
-                  <c:v>410</c:v>
+                  <c:v>0.01005</c:v>
                 </c:pt>
                 <c:pt idx="2">
-                  <c:v>480</c:v>
+                  <c:v>0.01185</c:v>
                 </c:pt>
                 <c:pt idx="3">
-                  <c:v>530</c:v>
+                  <c:v>0.01359</c:v>
                 </c:pt>
                 <c:pt idx="4">
-                  <c:v>620</c:v>
+                  <c:v>0.01642</c:v>
                 </c:pt>
                 <c:pt idx="5">
-                  <c:v>890</c:v>
+                  <c:v>0.02653</c:v>
                 </c:pt>
               </c:numCache>
             </c:numRef>
@@ -917,6 +957,8 @@
         <c:axId val="2094734552"/>
         <c:scaling>
           <c:orientation val="minMax"/>
+          <c:max val="0.03"/>
+          <c:min val="0.0"/>
         </c:scaling>
         <c:delete val="0"/>
         <c:axPos val="b"/>
@@ -931,7 +973,7 @@
             </a:ln>
           </c:spPr>
         </c:majorGridlines>
-        <c:numFmt formatCode="General" sourceLinked="0"/>
+        <c:numFmt formatCode="0.00" sourceLinked="0"/>
         <c:majorTickMark val="out"/>
         <c:minorTickMark val="none"/>
         <c:tickLblPos val="low"/>
@@ -962,6 +1004,7 @@
         <c:crossAx val="2094734554"/>
         <c:crosses val="autoZero"/>
         <c:crossBetween val="between"/>
+        <c:majorUnit val="0.01"/>
       </c:valAx>
       <c:spPr>
         <a:noFill/>
@@ -1559,10 +1602,8 @@
           <a:lstStyle/>
           <a:p>
             <a:r>
-              <a:rPr lang="en-US" dirty="0"/>
-              <a:t>This slide is the heart of your EDA story. Shocks, emergency access, and product diversity matter more than income alone. That's a policy-relevant finding that goes beyond the model.</a:t>
-            </a:r>
-            <a:endParaRPr lang="en-US" dirty="0"/>
+              <a:t>Be precise about effect sizes. Shock: 60% vs 47% Worsened. No emergency cash: 59% vs 46% Worsened, and Improved 14% vs 28%. 3+ products: Improved 23% vs 16%, but Worsened 53% vs 50%, so products are not a shield on their own. These associations (not causes) informed the engineered features.</a:t>
+            </a:r>
           </a:p>
         </p:txBody>
       </p:sp>
@@ -1647,10 +1688,8 @@
           <a:lstStyle/>
           <a:p>
             <a:r>
-              <a:rPr lang="en-US" dirty="0"/>
-              <a:t>Emphasise the feature engineering step — this is where domain knowledge enters the model. financial_health_score alone captures 4 columns into one meaningful signal. Judges will ask about this.</a:t>
-            </a:r>
-            <a:endParaRPr lang="en-US" dirty="0"/>
+              <a:t>Pipeline: encoding, SMOTENC and scaling all sit inside an imbalanced-learn pipeline, so they are fitted on training folds only. Five models are compared with stratified 5-fold CV; LightGBM is tuned with a 24-iteration randomised search. The model is chosen on CV score, per-class decision weights (x1.2 for Improved and Stayed the same) are tuned on out-of-fold predictions, and the 20% test set is used once. fully_excluded was redefined: 'no formal service and no mobile money' was identical to 'no formal service'.</a:t>
+            </a:r>
           </a:p>
         </p:txBody>
       </p:sp>
@@ -1735,10 +1774,8 @@
           <a:lstStyle/>
           <a:p>
             <a:r>
-              <a:rPr lang="en-US" dirty="0"/>
-              <a:t>Walk through the table per class. The model struggles most on 'Stayed the same' — intuitively the hardest class because it's the middle ground. Honest about limitations: we would improve further with SMOTE and LightGBM.</a:t>
-            </a:r>
-            <a:endParaRPr lang="en-US" dirty="0"/>
+              <a:t>Walk through the table per class. 'Stayed the same' is the hardest class (F1 0.36) because it is the middle ground. Be upfront: boosting + SMOTENC is a modest gain. CV: 0.548 vs 0.535 for the Random Forest (about 3 standard deviations); test: 0.542 vs 0.538 (within noise). Dropping the self-reported resilience items costs about 2 points (0.542 to 0.520), so the model is not just echoing them. Bars: LR = logistic regression, RF = random forest, LGBM = LightGBM, SM = SMOTENC, Final = LGBM+SMOTENC with tuned class weights.</a:t>
+            </a:r>
           </a:p>
         </p:txBody>
       </p:sp>
@@ -1823,10 +1860,8 @@
           <a:lstStyle/>
           <a:p>
             <a:r>
-              <a:rPr lang="en-US" dirty="0"/>
-              <a:t>This is the most important slide for judges. The engineered features dominate — this validates our domain-knowledge decisions. Emphasise: income matters but it's not destiny. Behaviour and resilience matter more.</a:t>
-            </a:r>
-            <a:endParaRPr lang="en-US" dirty="0"/>
+              <a:t>Permutation importance on the held-out test set: how much weighted F1 drops when a feature is shuffled. County, age group and income lead; the engineered financial health score is the top engineered feature and the top resilience signal. shock_no_savings and fully_excluded do NOT make the top 10. Fully excluded respondents are 78% rural but report 'Worsened' LESS often (44% vs 53%), so exclusion marks a different vulnerability rather than a worsening trajectory. Associations, not causes.</a:t>
+            </a:r>
           </a:p>
         </p:txBody>
       </p:sp>
@@ -1947,6 +1982,76 @@
         <p14:creationId xmlns:p14="http://schemas.microsoft.com/office/powerpoint/2010/main" val="1024086991"/>
       </p:ext>
     </p:extLst>
+  </p:cSld>
+  <p:clrMapOvr>
+    <a:masterClrMapping/>
+  </p:clrMapOvr>
+</p:notes>
+</file>
+
+<file path=ppt/notesSlides/notesSlide8.xml><?xml version="1.0" encoding="utf-8"?>
+<p:notes xmlns:a="http://schemas.openxmlformats.org/drawingml/2006/main" xmlns:p="http://schemas.openxmlformats.org/presentationml/2006/main" xmlns:r="http://schemas.openxmlformats.org/officeDocument/2006/relationships">
+  <p:cSld>
+    <p:spTree>
+      <p:nvGrpSpPr>
+        <p:cNvPr id="1" name=""/>
+        <p:cNvGrpSpPr/>
+        <p:nvPr/>
+      </p:nvGrpSpPr>
+      <p:grpSpPr>
+        <a:xfrm>
+          <a:off x="0" y="0"/>
+          <a:ext cx="0" cy="0"/>
+          <a:chOff x="0" y="0"/>
+          <a:chExt cx="0" cy="0"/>
+        </a:xfrm>
+      </p:grpSpPr>
+      <p:sp>
+        <p:nvSpPr>
+          <p:cNvPr id="2" name="Slide Image Placeholder 1"/>
+          <p:cNvSpPr>
+            <a:spLocks noGrp="1"/>
+          </p:cNvSpPr>
+          <p:nvPr>
+            <p:ph type="sldImg" idx="2"/>
+          </p:nvPr>
+        </p:nvSpPr>
+        <p:spPr/>
+      </p:sp>
+      <p:sp>
+        <p:nvSpPr>
+          <p:cNvPr id="3" name="Notes Placeholder 2"/>
+          <p:cNvSpPr>
+            <a:spLocks noGrp="1"/>
+          </p:cNvSpPr>
+          <p:nvPr>
+            <p:ph type="body" idx="3" sz="quarter"/>
+          </p:nvPr>
+        </p:nvSpPr>
+        <p:spPr/>
+        <p:txBody>
+          <a:bodyPr/>
+          <a:lstStyle/>
+          <a:p>
+            <a:r>
+              <a:t>Close the analysis honestly before the recommendations: the model finds patterns worth acting on, but they are associations in a single survey wave, without survey weights. Next steps would be weighting, longitudinal data and a fairness audit.</a:t>
+            </a:r>
+          </a:p>
+        </p:txBody>
+      </p:sp>
+      <p:sp>
+        <p:nvSpPr>
+          <p:cNvPr id="4" name="Slide Number Placeholder 3"/>
+          <p:cNvSpPr>
+            <a:spLocks noGrp="1"/>
+          </p:cNvSpPr>
+          <p:nvPr>
+            <p:ph type="sldNum" idx="5" sz="quarter"/>
+          </p:nvPr>
+        </p:nvSpPr>
+        <p:spPr/>
+      </p:sp>
+    </p:spTree>
   </p:cSld>
   <p:clrMapOvr>
     <a:masterClrMapping/>
@@ -2664,7 +2769,7 @@
                 <a:ea typeface="Cambria" pitchFamily="34" charset="-122"/>
                 <a:cs typeface="Cambria" pitchFamily="34" charset="-120"/>
               </a:rPr>
-              <a:t>9.9%</a:t>
+              <a:t>9.3%</a:t>
             </a:r>
             <a:endParaRPr lang="en-US" sz="3400" dirty="0"/>
           </a:p>
@@ -2703,7 +2808,7 @@
                 <a:ea typeface="Calibri" pitchFamily="34" charset="-122"/>
                 <a:cs typeface="Calibri" pitchFamily="34" charset="-120"/>
               </a:rPr>
-              <a:t>of adults remain fully excluded from all financial services</a:t>
+              <a:t>of respondents use no formal service, informal savings or informal loans</a:t>
             </a:r>
             <a:endParaRPr lang="en-US" sz="1050" dirty="0"/>
           </a:p>
@@ -3708,7 +3813,7 @@
                 <a:ea typeface="Cambria" pitchFamily="34" charset="-122"/>
                 <a:cs typeface="Cambria" pitchFamily="34" charset="-120"/>
               </a:rPr>
-              <a:t>Financial resilience, not income alone, determines outcomes.</a:t>
+              <a:t>Financial resilience matters at least as much as income.</a:t>
             </a:r>
             <a:endParaRPr lang="en-US" sz="2800" dirty="0"/>
           </a:p>
@@ -3812,7 +3917,7 @@
                 <a:ea typeface="Calibri" pitchFamily="34" charset="-122"/>
                 <a:cs typeface="Calibri" pitchFamily="34" charset="-120"/>
               </a:rPr>
-              <a:t>Shocks are decisive</a:t>
+              <a:t>Shocks raise the risk</a:t>
             </a:r>
             <a:endParaRPr lang="en-US" sz="1300" dirty="0"/>
           </a:p>
@@ -3851,7 +3956,7 @@
                 <a:ea typeface="Calibri" pitchFamily="34" charset="-122"/>
                 <a:cs typeface="Calibri" pitchFamily="34" charset="-120"/>
               </a:rPr>
-              <a:t>Respondents who experienced a financial shock are over-represented in 'Worsened' by a 2:1 margin vs those who did not.</a:t>
+              <a:t>Respondents who experienced a financial shock are more likely to report 'Worsened': 60% vs 47% for those who did not.</a:t>
             </a:r>
             <a:endParaRPr lang="en-US" sz="1150" dirty="0"/>
           </a:p>
@@ -3994,7 +4099,7 @@
                 <a:ea typeface="Calibri" pitchFamily="34" charset="-122"/>
                 <a:cs typeface="Calibri" pitchFamily="34" charset="-120"/>
               </a:rPr>
-              <a:t>Those who CANNOT access KES 13,000 in an emergency are concentrated almost entirely in the Worsened category.</a:t>
+              <a:t>Those who CANNOT access KES 13,000 within a month report 'Worsened' 59% of the time and 'Improved' only 14%, vs 46% and 28% for those who can.</a:t>
             </a:r>
             <a:endParaRPr lang="en-US" sz="1150" dirty="0"/>
           </a:p>
@@ -4098,7 +4203,7 @@
                 <a:ea typeface="Calibri" pitchFamily="34" charset="-122"/>
                 <a:cs typeface="Calibri" pitchFamily="34" charset="-120"/>
               </a:rPr>
-              <a:t>More products = better outcomes</a:t>
+              <a:t>More products help, but only partly</a:t>
             </a:r>
             <a:endParaRPr lang="en-US" sz="1300" dirty="0"/>
           </a:p>
@@ -4137,7 +4242,7 @@
                 <a:ea typeface="Calibri" pitchFamily="34" charset="-122"/>
                 <a:cs typeface="Calibri" pitchFamily="34" charset="-120"/>
               </a:rPr>
-              <a:t>People using 3+ financial products report improved or stable outcomes at twice the rate of those using 0–1 products.</a:t>
+              <a:t>People using 3+ financial products report 'Improved' more often (23% vs 16% for 0-1 products), but 'Worsened' stays near 50%: usage alone is not protection.</a:t>
             </a:r>
             <a:endParaRPr lang="en-US" sz="1150" dirty="0"/>
           </a:p>
@@ -4478,7 +4583,7 @@
                 <a:ea typeface="Calibri" pitchFamily="34" charset="-122"/>
                 <a:cs typeface="Calibri" pitchFamily="34" charset="-120"/>
               </a:rPr>
-              <a:t>Fill barriers_bank NAs with 'No barrier'. Drop 5 duplicates.</a:t>
+              <a:t>Drop 5 duplicates. Fill barrier NAs with 'No barrier'. Tidy labels.</a:t>
             </a:r>
             <a:endParaRPr lang="en-US" sz="950" dirty="0"/>
           </a:p>
@@ -4856,7 +4961,7 @@
                 <a:ea typeface="Calibri" pitchFamily="34" charset="-122"/>
                 <a:cs typeface="Calibri" pitchFamily="34" charset="-120"/>
               </a:rPr>
-              <a:t>One-hot encoding. Sanitised column names.</a:t>
+              <a:t>Ordinal + one-hot encoding inside the pipeline (no leakage).</a:t>
             </a:r>
             <a:endParaRPr lang="en-US" sz="950" dirty="0"/>
           </a:p>
@@ -5045,7 +5150,7 @@
                 <a:ea typeface="Calibri" pitchFamily="34" charset="-122"/>
                 <a:cs typeface="Calibri" pitchFamily="34" charset="-120"/>
               </a:rPr>
-              <a:t>80/20 stratified split. Scale numerics on train only.</a:t>
+              <a:t>80/20 stratified split. 5-fold stratified CV on train.</a:t>
             </a:r>
             <a:endParaRPr lang="en-US" sz="950" dirty="0"/>
           </a:p>
@@ -5211,7 +5316,7 @@
                 <a:ea typeface="Calibri" pitchFamily="34" charset="-122"/>
                 <a:cs typeface="Calibri" pitchFamily="34" charset="-120"/>
               </a:rPr>
-              <a:t>Tuned Random Forest. class_weight='balanced_subsample'.</a:t>
+              <a:t>5 models, SMOTENC inside folds. LightGBM + SMOTENC chosen by CV.</a:t>
             </a:r>
             <a:endParaRPr lang="en-US" sz="950" dirty="0"/>
           </a:p>
@@ -5279,7 +5384,7 @@
                 <a:ea typeface="Calibri" pitchFamily="34" charset="-122"/>
                 <a:cs typeface="Calibri" pitchFamily="34" charset="-120"/>
               </a:rPr>
-              <a:t>Engineered Features  (the biggest quality jump)</a:t>
+              <a:t>Engineered Features</a:t>
             </a:r>
             <a:endParaRPr lang="en-US" sz="1300" dirty="0"/>
           </a:p>
@@ -5357,7 +5462,7 @@
                 <a:ea typeface="Calibri" pitchFamily="34" charset="-122"/>
                 <a:cs typeface="Calibri" pitchFamily="34" charset="-120"/>
               </a:rPr>
-              <a:t>Sum of 4 NFHI indicators (0–4). Single composite resilience score.</a:t>
+              <a:t>Sum of 4 NFHI indicators (0-4). Worsened falls from 76% to 35% across the scale.</a:t>
             </a:r>
             <a:endParaRPr lang="en-US" sz="950" dirty="0"/>
           </a:p>
@@ -5435,7 +5540,7 @@
                 <a:ea typeface="Calibri" pitchFamily="34" charset="-122"/>
                 <a:cs typeface="Calibri" pitchFamily="34" charset="-120"/>
               </a:rPr>
-              <a:t>1 if shock occurred AND respondent has zero savings buffer.</a:t>
+              <a:t>1 if shock AND no savings buffer. 18% of respondents; 62% report Worsened.</a:t>
             </a:r>
             <a:endParaRPr lang="en-US" sz="950" dirty="0"/>
           </a:p>
@@ -5513,7 +5618,7 @@
                 <a:ea typeface="Calibri" pitchFamily="34" charset="-122"/>
                 <a:cs typeface="Calibri" pitchFamily="34" charset="-120"/>
               </a:rPr>
-              <a:t>1 if no formal service use AND no mobile money access.</a:t>
+              <a:t>1 if no formal service, no informal savings and no informal loans (9.3%).</a:t>
             </a:r>
             <a:endParaRPr lang="en-US" sz="950" dirty="0"/>
           </a:p>
@@ -5786,7 +5891,7 @@
                 <a:ea typeface="Calibri" pitchFamily="34" charset="-122"/>
                 <a:cs typeface="Calibri" pitchFamily="34" charset="-120"/>
               </a:rPr>
-              <a:t>Tuned Random Forest</a:t>
+              <a:t>LightGBM + SMOTENC (test set)</a:t>
             </a:r>
             <a:endParaRPr lang="en-US" sz="1100" dirty="0"/>
           </a:p>
@@ -5921,7 +6026,7 @@
                           <a:ea typeface="Calibri" pitchFamily="34" charset="-122"/>
                           <a:cs typeface="Calibri" pitchFamily="34" charset="-120"/>
                         </a:rPr>
-                        <a:t>Precision</a:t>
+                        <a:t>Prec.</a:t>
                       </a:r>
                       <a:endParaRPr lang="en-US" sz="1100" dirty="0">
                         <a:latin typeface="Calibri" charset="0"/>
@@ -6099,7 +6204,7 @@
                           <a:ea typeface="Calibri" pitchFamily="34" charset="-122"/>
                           <a:cs typeface="Calibri" pitchFamily="34" charset="-120"/>
                         </a:rPr>
-                        <a:t>0.44</a:t>
+                        <a:t>0.41</a:t>
                       </a:r>
                       <a:endParaRPr lang="en-US" sz="1100" dirty="0">
                         <a:latin typeface="Calibri" charset="0"/>
@@ -6143,7 +6248,7 @@
                           <a:ea typeface="Calibri" pitchFamily="34" charset="-122"/>
                           <a:cs typeface="Calibri" pitchFamily="34" charset="-120"/>
                         </a:rPr>
-                        <a:t>0.48</a:t>
+                        <a:t>0.42</a:t>
                       </a:r>
                       <a:endParaRPr lang="en-US" sz="1100" dirty="0">
                         <a:latin typeface="Calibri" charset="0"/>
@@ -6187,7 +6292,7 @@
                           <a:ea typeface="Calibri" pitchFamily="34" charset="-122"/>
                           <a:cs typeface="Calibri" pitchFamily="34" charset="-120"/>
                         </a:rPr>
-                        <a:t>0.46</a:t>
+                        <a:t>0.42</a:t>
                       </a:r>
                       <a:endParaRPr lang="en-US" sz="1100" dirty="0">
                         <a:latin typeface="Calibri" charset="0"/>
@@ -6277,7 +6382,7 @@
                           <a:ea typeface="Calibri" pitchFamily="34" charset="-122"/>
                           <a:cs typeface="Calibri" pitchFamily="34" charset="-120"/>
                         </a:rPr>
-                        <a:t>0.43</a:t>
+                        <a:t>0.42</a:t>
                       </a:r>
                       <a:endParaRPr lang="en-US" sz="1100" dirty="0">
                         <a:latin typeface="Calibri" charset="0"/>
@@ -6321,7 +6426,7 @@
                           <a:ea typeface="Calibri" pitchFamily="34" charset="-122"/>
                           <a:cs typeface="Calibri" pitchFamily="34" charset="-120"/>
                         </a:rPr>
-                        <a:t>0.39</a:t>
+                        <a:t>0.31</a:t>
                       </a:r>
                       <a:endParaRPr lang="en-US" sz="1100" dirty="0">
                         <a:latin typeface="Calibri" charset="0"/>
@@ -6365,7 +6470,7 @@
                           <a:ea typeface="Calibri" pitchFamily="34" charset="-122"/>
                           <a:cs typeface="Calibri" pitchFamily="34" charset="-120"/>
                         </a:rPr>
-                        <a:t>0.41</a:t>
+                        <a:t>0.36</a:t>
                       </a:r>
                       <a:endParaRPr lang="en-US" sz="1100" dirty="0">
                         <a:latin typeface="Calibri" charset="0"/>
@@ -6455,7 +6560,7 @@
                           <a:ea typeface="Calibri" pitchFamily="34" charset="-122"/>
                           <a:cs typeface="Calibri" pitchFamily="34" charset="-120"/>
                         </a:rPr>
-                        <a:t>0.68</a:t>
+                        <a:t>0.65</a:t>
                       </a:r>
                       <a:endParaRPr lang="en-US" sz="1100" dirty="0">
                         <a:latin typeface="Calibri" charset="0"/>
@@ -6499,7 +6604,7 @@
                           <a:ea typeface="Calibri" pitchFamily="34" charset="-122"/>
                           <a:cs typeface="Calibri" pitchFamily="34" charset="-120"/>
                         </a:rPr>
-                        <a:t>0.70</a:t>
+                        <a:t>0.73</a:t>
                       </a:r>
                       <a:endParaRPr lang="en-US" sz="1100" dirty="0">
                         <a:latin typeface="Calibri" charset="0"/>
@@ -6630,7 +6735,7 @@
                 <a:ea typeface="Calibri" pitchFamily="34" charset="-122"/>
                 <a:cs typeface="Calibri" pitchFamily="34" charset="-120"/>
               </a:rPr>
-              <a:t>The model performs best on 'Worsened' (the majority class) and struggles most on 'Stayed the same'. This is expected with imbalanced data — further gains would require SMOTE or boosting.</a:t>
+              <a:t>Best on 'Worsened' (the majority class); 'Stayed the same' is hardest. LightGBM + SMOTENC beats the Random Forest in CV (0.548 vs 0.535) but only narrowly on test (0.542 vs 0.538).</a:t>
             </a:r>
             <a:endParaRPr lang="en-US" sz="1000" dirty="0"/>
           </a:p>
@@ -6669,7 +6774,7 @@
                 <a:ea typeface="Calibri" pitchFamily="34" charset="-122"/>
                 <a:cs typeface="Calibri" pitchFamily="34" charset="-120"/>
               </a:rPr>
-              <a:t>Model Progression</a:t>
+              <a:t>Model Comparison (test F1)</a:t>
             </a:r>
             <a:endParaRPr lang="en-US" sz="1300" dirty="0"/>
           </a:p>
@@ -6746,7 +6851,7 @@
                 <a:ea typeface="Calibri" pitchFamily="34" charset="-122"/>
                 <a:cs typeface="Calibri" pitchFamily="34" charset="-120"/>
               </a:rPr>
-              <a:t>Primary metric: Weighted F1-Score — accounts for class imbalance. Accuracy alone would be misleading.</a:t>
+              <a:t>Primary metric: weighted F1 (accounts for class imbalance). Test macro-F1 0.49, accuracy 0.55.</a:t>
             </a:r>
             <a:endParaRPr lang="en-US" sz="1050" dirty="0"/>
           </a:p>
@@ -6837,7 +6942,7 @@
                 <a:ea typeface="Cambria" pitchFamily="34" charset="-122"/>
                 <a:cs typeface="Cambria" pitchFamily="34" charset="-120"/>
               </a:rPr>
-              <a:t>Key Drivers of Financial Deterioration</a:t>
+              <a:t>Key Drivers of Financial Status</a:t>
             </a:r>
             <a:endParaRPr lang="en-US" sz="2400" dirty="0"/>
           </a:p>
@@ -6876,7 +6981,7 @@
                 <a:ea typeface="Calibri" pitchFamily="34" charset="-122"/>
                 <a:cs typeface="Calibri" pitchFamily="34" charset="-120"/>
               </a:rPr>
-              <a:t>Guiding Question Answer</a:t>
+              <a:t>Permutation importance</a:t>
             </a:r>
             <a:endParaRPr lang="en-US" sz="1100" dirty="0"/>
           </a:p>
@@ -7019,7 +7124,7 @@
                 <a:ea typeface="Calibri" pitchFamily="34" charset="-122"/>
                 <a:cs typeface="Calibri" pitchFamily="34" charset="-120"/>
               </a:rPr>
-              <a:t>Financial Health Score</a:t>
+              <a:t>County</a:t>
             </a:r>
             <a:endParaRPr lang="en-US" sz="1150" dirty="0"/>
           </a:p>
@@ -7058,7 +7163,7 @@
                 <a:ea typeface="Calibri" pitchFamily="34" charset="-122"/>
                 <a:cs typeface="Calibri" pitchFamily="34" charset="-120"/>
               </a:rPr>
-              <a:t>Engineered composite of 4 resilience indicators. The single strongest predictor.</a:t>
+              <a:t>Strongest single signal: 'Worsened' ranges from 28% (Wajir) to 73% (Kisumu).</a:t>
             </a:r>
             <a:endParaRPr lang="en-US" sz="950" dirty="0"/>
           </a:p>
@@ -7185,7 +7290,7 @@
                 <a:ea typeface="Calibri" pitchFamily="34" charset="-122"/>
                 <a:cs typeface="Calibri" pitchFamily="34" charset="-120"/>
               </a:rPr>
-              <a:t>Shock + No Savings</a:t>
+              <a:t>Age Group</a:t>
             </a:r>
             <a:endParaRPr lang="en-US" sz="1150" dirty="0"/>
           </a:p>
@@ -7224,7 +7329,7 @@
                 <a:ea typeface="Calibri" pitchFamily="34" charset="-122"/>
                 <a:cs typeface="Calibri" pitchFamily="34" charset="-120"/>
               </a:rPr>
-              <a:t>The most dangerous combination. A shock with zero buffer almost guarantees worsening.</a:t>
+              <a:t>'Worsened' climbs from 41% (ages 18-25) to 59-61% for ages 36 and over.</a:t>
             </a:r>
             <a:endParaRPr lang="en-US" sz="950" dirty="0"/>
           </a:p>
@@ -7351,7 +7456,7 @@
                 <a:ea typeface="Calibri" pitchFamily="34" charset="-122"/>
                 <a:cs typeface="Calibri" pitchFamily="34" charset="-120"/>
               </a:rPr>
-              <a:t>Fully Excluded</a:t>
+              <a:t>Monthly Income</a:t>
             </a:r>
             <a:endParaRPr lang="en-US" sz="1150" dirty="0"/>
           </a:p>
@@ -7390,7 +7495,7 @@
                 <a:ea typeface="Calibri" pitchFamily="34" charset="-122"/>
                 <a:cs typeface="Calibri" pitchFamily="34" charset="-120"/>
               </a:rPr>
-              <a:t>No formal services + no mobile money. Mostly rural, often without national ID.</a:t>
+              <a:t>Matters, but overlaps widely: median KES 7,000 (Improved) vs 5,000 (others).</a:t>
             </a:r>
             <a:endParaRPr lang="en-US" sz="950" dirty="0"/>
           </a:p>
@@ -7517,7 +7622,7 @@
                 <a:ea typeface="Calibri" pitchFamily="34" charset="-122"/>
                 <a:cs typeface="Calibri" pitchFamily="34" charset="-120"/>
               </a:rPr>
-              <a:t>Monthly Income</a:t>
+              <a:t>Financial Health Score</a:t>
             </a:r>
             <a:endParaRPr lang="en-US" sz="1150" dirty="0"/>
           </a:p>
@@ -7556,7 +7661,7 @@
                 <a:ea typeface="Calibri" pitchFamily="34" charset="-122"/>
                 <a:cs typeface="Calibri" pitchFamily="34" charset="-120"/>
               </a:rPr>
-              <a:t>Important but not decisive — many low-income respondents still improved.</a:t>
+              <a:t>Engineered resilience score: 'Worsened' falls from 76% (score 0) to 35% (score 4).</a:t>
             </a:r>
             <a:endParaRPr lang="en-US" sz="950" dirty="0"/>
           </a:p>
@@ -7795,7 +7900,7 @@
                 <a:ea typeface="Calibri" pitchFamily="34" charset="-122"/>
                 <a:cs typeface="Calibri" pitchFamily="34" charset="-120"/>
               </a:rPr>
-              <a:t>Expand national ID registration — exclusion is often a documentation problem first.</a:t>
+              <a:t>Make basic accounts fee-free: affordability is the top bank barrier (68%); eligibility/ID is 10%.</a:t>
             </a:r>
             <a:endParaRPr lang="en-US" sz="1050" dirty="0"/>
           </a:p>
@@ -7863,7 +7968,7 @@
                 <a:ea typeface="Calibri" pitchFamily="34" charset="-122"/>
                 <a:cs typeface="Calibri" pitchFamily="34" charset="-120"/>
               </a:rPr>
-              <a:t>Fund safety-net programmes targeting households scoring 0–1 on the financial health scale.</a:t>
+              <a:t>Fund safety nets for households scoring 0-1 on the financial health scale (64-76% report Worsened).</a:t>
             </a:r>
             <a:endParaRPr lang="en-US" sz="1050" dirty="0"/>
           </a:p>
@@ -7931,7 +8036,7 @@
                 <a:ea typeface="Calibri" pitchFamily="34" charset="-122"/>
                 <a:cs typeface="Calibri" pitchFamily="34" charset="-120"/>
               </a:rPr>
-              <a:t>Mandate affordable micro-insurance products in underserved counties.</a:t>
+              <a:t>Back affordable micro-insurance, starting in high-Worsened counties (e.g. Kisumu 73%, Homabay 71%).</a:t>
             </a:r>
             <a:endParaRPr lang="en-US" sz="1050" dirty="0"/>
           </a:p>
@@ -8060,7 +8165,7 @@
                 <a:ea typeface="Calibri" pitchFamily="34" charset="-122"/>
                 <a:cs typeface="Calibri" pitchFamily="34" charset="-120"/>
               </a:rPr>
-              <a:t>Expand agent banking in rural areas — geographic access remains a core barrier.</a:t>
+              <a:t>Cut fees on basic accounts and agent transactions: cost, not distance, is the barrier (68% vs 7% 'access').</a:t>
             </a:r>
             <a:endParaRPr lang="en-US" sz="1050" dirty="0"/>
           </a:p>
@@ -8196,7 +8301,7 @@
                 <a:ea typeface="Calibri" pitchFamily="34" charset="-122"/>
                 <a:cs typeface="Calibri" pitchFamily="34" charset="-120"/>
               </a:rPr>
-              <a:t>Incentivise uptake of 3+ products; active inclusion predicts resilience.</a:t>
+              <a:t>Promote small-ticket savings: a shock with no savings means 62% Worsened vs 51% otherwise.</a:t>
             </a:r>
             <a:endParaRPr lang="en-US" sz="1050" dirty="0"/>
           </a:p>
@@ -8393,7 +8498,7 @@
                 <a:ea typeface="Calibri" pitchFamily="34" charset="-122"/>
                 <a:cs typeface="Calibri" pitchFamily="34" charset="-120"/>
               </a:rPr>
-              <a:t>Target 'shock + no savings' households for emergency cash transfers.</a:t>
+              <a:t>Target 'shock + no savings' households (18% of respondents) for emergency cash transfers.</a:t>
             </a:r>
             <a:endParaRPr lang="en-US" sz="1050" dirty="0"/>
           </a:p>
@@ -8461,7 +8566,7 @@
                 <a:ea typeface="Calibri" pitchFamily="34" charset="-122"/>
                 <a:cs typeface="Calibri" pitchFamily="34" charset="-120"/>
               </a:rPr>
-              <a:t>Partner with mobile operators to remove barriers for the fully excluded.</a:t>
+              <a:t>Partner with mobile operators on phone-ownership barriers for the fully excluded (78% rural).</a:t>
             </a:r>
             <a:endParaRPr lang="en-US" sz="1050" dirty="0"/>
           </a:p>
@@ -8525,6 +8630,599 @@
               <a:t>Behind every data point is a real person. Our model shows who needs help most — now it's over to policymakers to act.</a:t>
             </a:r>
             <a:endParaRPr lang="en-US" sz="1100" dirty="0"/>
+          </a:p>
+        </p:txBody>
+      </p:sp>
+    </p:spTree>
+  </p:cSld>
+  <p:clrMapOvr>
+    <a:masterClrMapping/>
+  </p:clrMapOvr>
+</p:sld>
+</file>
+
+<file path=ppt/slides/slide8.xml><?xml version="1.0" encoding="utf-8"?>
+<p:sld xmlns:a="http://schemas.openxmlformats.org/drawingml/2006/main" xmlns:p="http://schemas.openxmlformats.org/presentationml/2006/main" xmlns:r="http://schemas.openxmlformats.org/officeDocument/2006/relationships">
+  <p:cSld>
+    <p:bg>
+      <p:bgPr>
+        <a:solidFill>
+          <a:srgbClr val="1B2A4A"/>
+        </a:solidFill>
+      </p:bgPr>
+    </p:bg>
+    <p:spTree>
+      <p:nvGrpSpPr>
+        <p:cNvPr id="1" name=""/>
+        <p:cNvGrpSpPr/>
+        <p:nvPr/>
+      </p:nvGrpSpPr>
+      <p:grpSpPr/>
+      <p:sp>
+        <p:nvSpPr>
+          <p:cNvPr id="2" name="Text 0"/>
+          <p:cNvSpPr/>
+          <p:nvPr/>
+        </p:nvSpPr>
+        <p:spPr>
+          <a:xfrm>
+            <a:off x="457200" y="274320"/>
+            <a:ext cx="8229600" cy="411480"/>
+          </a:xfrm>
+          <a:prstGeom prst="rect">
+            <a:avLst/>
+          </a:prstGeom>
+          <a:noFill/>
+          <a:ln/>
+        </p:spPr>
+        <p:txBody>
+          <a:bodyPr wrap="square" lIns="0" tIns="0" rIns="0" bIns="0" rtlCol="0" anchor="ctr"/>
+          <a:lstStyle/>
+          <a:p>
+            <a:pPr indent="0" marL="0">
+              <a:buNone/>
+            </a:pPr>
+            <a:r>
+              <a:rPr lang="en-US" sz="1300" b="1" dirty="0">
+                <a:solidFill>
+                  <a:srgbClr val="E8A838"/>
+                </a:solidFill>
+                <a:latin typeface="Calibri" pitchFamily="34" charset="0"/>
+                <a:ea typeface="Calibri" pitchFamily="34" charset="-122"/>
+                <a:cs typeface="Calibri" pitchFamily="34" charset="-120"/>
+              </a:rPr>
+              <a:t>Limitations &amp; Next Steps</a:t>
+            </a:r>
+            <a:endParaRPr lang="en-US" sz="1300" dirty="0"/>
+          </a:p>
+        </p:txBody>
+      </p:sp>
+      <p:sp>
+        <p:nvSpPr>
+          <p:cNvPr id="3" name="Text 1"/>
+          <p:cNvSpPr/>
+          <p:nvPr/>
+        </p:nvSpPr>
+        <p:spPr>
+          <a:xfrm>
+            <a:off x="457200" y="685800"/>
+            <a:ext cx="8229600" cy="777240"/>
+          </a:xfrm>
+          <a:prstGeom prst="rect">
+            <a:avLst/>
+          </a:prstGeom>
+          <a:noFill/>
+          <a:ln/>
+        </p:spPr>
+        <p:txBody>
+          <a:bodyPr wrap="square" lIns="0" tIns="0" rIns="0" bIns="0" rtlCol="0" anchor="ctr"/>
+          <a:lstStyle/>
+          <a:p>
+            <a:pPr indent="0" marL="0">
+              <a:buNone/>
+            </a:pPr>
+            <a:r>
+              <a:rPr lang="en-US" sz="2800" b="1" dirty="0">
+                <a:solidFill>
+                  <a:srgbClr val="FFFFFF"/>
+                </a:solidFill>
+                <a:latin typeface="Cambria" pitchFamily="34" charset="0"/>
+                <a:ea typeface="Cambria" pitchFamily="34" charset="-122"/>
+                <a:cs typeface="Cambria" pitchFamily="34" charset="-120"/>
+              </a:rPr>
+              <a:t>What the model can and cannot tell us.</a:t>
+            </a:r>
+            <a:endParaRPr lang="en-US" sz="2800" dirty="0"/>
+          </a:p>
+        </p:txBody>
+      </p:sp>
+      <p:sp>
+        <p:nvSpPr>
+          <p:cNvPr id="4" name="Shape 2"/>
+          <p:cNvSpPr/>
+          <p:nvPr/>
+        </p:nvSpPr>
+        <p:spPr>
+          <a:xfrm>
+            <a:off x="320040" y="1600200"/>
+            <a:ext cx="2697480" cy="3246120"/>
+          </a:xfrm>
+          <a:prstGeom prst="roundRect">
+            <a:avLst>
+              <a:gd name="adj" fmla="val 3390"/>
+            </a:avLst>
+          </a:prstGeom>
+          <a:solidFill>
+            <a:srgbClr val="243558"/>
+          </a:solidFill>
+          <a:ln/>
+          <a:effectLst>
+            <a:outerShdw sx="100000" sy="100000" kx="0" ky="0" algn="bl" rotWithShape="0" blurRad="101600" dist="38100" dir="2700000">
+              <a:srgbClr val="000000">
+                <a:alpha val="12000"/>
+              </a:srgbClr>
+            </a:outerShdw>
+          </a:effectLst>
+        </p:spPr>
+      </p:sp>
+      <p:sp>
+        <p:nvSpPr>
+          <p:cNvPr id="5" name="Text 3"/>
+          <p:cNvSpPr/>
+          <p:nvPr/>
+        </p:nvSpPr>
+        <p:spPr>
+          <a:xfrm>
+            <a:off x="457200" y="1737360"/>
+            <a:ext cx="2423160" cy="502920"/>
+          </a:xfrm>
+          <a:prstGeom prst="rect">
+            <a:avLst/>
+          </a:prstGeom>
+          <a:noFill/>
+          <a:ln/>
+        </p:spPr>
+        <p:txBody>
+          <a:bodyPr wrap="square" lIns="0" tIns="0" rIns="0" bIns="0" rtlCol="0" anchor="ctr"/>
+          <a:lstStyle/>
+          <a:p>
+            <a:pPr algn="ctr" indent="0" marL="0">
+              <a:buNone/>
+            </a:pPr>
+            <a:r>
+              <a:rPr lang="en-US" sz="2600" dirty="0">
+                <a:solidFill>
+                  <a:srgbClr val="000000"/>
+                </a:solidFill>
+              </a:rPr>
+              <a:t>🔍</a:t>
+            </a:r>
+            <a:endParaRPr lang="en-US" sz="2600" dirty="0"/>
+          </a:p>
+        </p:txBody>
+      </p:sp>
+      <p:sp>
+        <p:nvSpPr>
+          <p:cNvPr id="6" name="Text 4"/>
+          <p:cNvSpPr/>
+          <p:nvPr/>
+        </p:nvSpPr>
+        <p:spPr>
+          <a:xfrm>
+            <a:off x="457200" y="2286000"/>
+            <a:ext cx="2423160" cy="502920"/>
+          </a:xfrm>
+          <a:prstGeom prst="rect">
+            <a:avLst/>
+          </a:prstGeom>
+          <a:noFill/>
+          <a:ln/>
+        </p:spPr>
+        <p:txBody>
+          <a:bodyPr wrap="square" lIns="0" tIns="0" rIns="0" bIns="0" rtlCol="0" anchor="ctr"/>
+          <a:lstStyle/>
+          <a:p>
+            <a:pPr algn="ctr" indent="0" marL="0">
+              <a:buNone/>
+            </a:pPr>
+            <a:r>
+              <a:rPr lang="en-US" sz="1300" b="1" dirty="0">
+                <a:solidFill>
+                  <a:srgbClr val="E8A838"/>
+                </a:solidFill>
+                <a:latin typeface="Calibri" pitchFamily="34" charset="0"/>
+                <a:ea typeface="Calibri" pitchFamily="34" charset="-122"/>
+                <a:cs typeface="Calibri" pitchFamily="34" charset="-120"/>
+              </a:rPr>
+              <a:t>Associations, not causes</a:t>
+            </a:r>
+            <a:endParaRPr lang="en-US" sz="1300" dirty="0"/>
+          </a:p>
+        </p:txBody>
+      </p:sp>
+      <p:sp>
+        <p:nvSpPr>
+          <p:cNvPr id="7" name="Text 5"/>
+          <p:cNvSpPr/>
+          <p:nvPr/>
+        </p:nvSpPr>
+        <p:spPr>
+          <a:xfrm>
+            <a:off x="484632" y="2834640"/>
+            <a:ext cx="2377440" cy="1828800"/>
+          </a:xfrm>
+          <a:prstGeom prst="rect">
+            <a:avLst/>
+          </a:prstGeom>
+          <a:noFill/>
+          <a:ln/>
+        </p:spPr>
+        <p:txBody>
+          <a:bodyPr wrap="square" lIns="0" tIns="0" rIns="0" bIns="0" rtlCol="0" anchor="t"/>
+          <a:lstStyle/>
+          <a:p>
+            <a:pPr algn="l" indent="0" marL="0">
+              <a:buNone/>
+            </a:pPr>
+            <a:r>
+              <a:rPr lang="en-US" sz="1150" dirty="0">
+                <a:solidFill>
+                  <a:srgbClr val="CADCFC"/>
+                </a:solidFill>
+                <a:latin typeface="Calibri" pitchFamily="34" charset="0"/>
+                <a:ea typeface="Calibri" pitchFamily="34" charset="-122"/>
+                <a:cs typeface="Calibri" pitchFamily="34" charset="-120"/>
+              </a:rPr>
+              <a:t>The survey is cross-sectional and several predictors are self-reported alongside the outcome. Dropping them costs about 2 F1 points (0.542 to 0.520).</a:t>
+            </a:r>
+            <a:endParaRPr lang="en-US" sz="1150" dirty="0"/>
+          </a:p>
+        </p:txBody>
+      </p:sp>
+      <p:sp>
+        <p:nvSpPr>
+          <p:cNvPr id="8" name="Shape 6"/>
+          <p:cNvSpPr/>
+          <p:nvPr/>
+        </p:nvSpPr>
+        <p:spPr>
+          <a:xfrm>
+            <a:off x="3246120" y="1600200"/>
+            <a:ext cx="2697480" cy="3246120"/>
+          </a:xfrm>
+          <a:prstGeom prst="roundRect">
+            <a:avLst>
+              <a:gd name="adj" fmla="val 3390"/>
+            </a:avLst>
+          </a:prstGeom>
+          <a:solidFill>
+            <a:srgbClr val="243558"/>
+          </a:solidFill>
+          <a:ln/>
+          <a:effectLst>
+            <a:outerShdw sx="100000" sy="100000" kx="0" ky="0" algn="bl" rotWithShape="0" blurRad="101600" dist="38100" dir="2700000">
+              <a:srgbClr val="000000">
+                <a:alpha val="12000"/>
+              </a:srgbClr>
+            </a:outerShdw>
+          </a:effectLst>
+        </p:spPr>
+      </p:sp>
+      <p:sp>
+        <p:nvSpPr>
+          <p:cNvPr id="9" name="Text 7"/>
+          <p:cNvSpPr/>
+          <p:nvPr/>
+        </p:nvSpPr>
+        <p:spPr>
+          <a:xfrm>
+            <a:off x="3383280" y="1737360"/>
+            <a:ext cx="2423160" cy="502920"/>
+          </a:xfrm>
+          <a:prstGeom prst="rect">
+            <a:avLst/>
+          </a:prstGeom>
+          <a:noFill/>
+          <a:ln/>
+        </p:spPr>
+        <p:txBody>
+          <a:bodyPr wrap="square" lIns="0" tIns="0" rIns="0" bIns="0" rtlCol="0" anchor="ctr"/>
+          <a:lstStyle/>
+          <a:p>
+            <a:pPr algn="ctr" indent="0" marL="0">
+              <a:buNone/>
+            </a:pPr>
+            <a:r>
+              <a:rPr lang="en-US" sz="2600" dirty="0">
+                <a:solidFill>
+                  <a:srgbClr val="000000"/>
+                </a:solidFill>
+              </a:rPr>
+              <a:t>🎯</a:t>
+            </a:r>
+            <a:endParaRPr lang="en-US" sz="2600" dirty="0"/>
+          </a:p>
+        </p:txBody>
+      </p:sp>
+      <p:sp>
+        <p:nvSpPr>
+          <p:cNvPr id="10" name="Text 8"/>
+          <p:cNvSpPr/>
+          <p:nvPr/>
+        </p:nvSpPr>
+        <p:spPr>
+          <a:xfrm>
+            <a:off x="3383280" y="2286000"/>
+            <a:ext cx="2423160" cy="502920"/>
+          </a:xfrm>
+          <a:prstGeom prst="rect">
+            <a:avLst/>
+          </a:prstGeom>
+          <a:noFill/>
+          <a:ln/>
+        </p:spPr>
+        <p:txBody>
+          <a:bodyPr wrap="square" lIns="0" tIns="0" rIns="0" bIns="0" rtlCol="0" anchor="ctr"/>
+          <a:lstStyle/>
+          <a:p>
+            <a:pPr algn="ctr" indent="0" marL="0">
+              <a:buNone/>
+            </a:pPr>
+            <a:r>
+              <a:rPr lang="en-US" sz="1300" b="1" dirty="0">
+                <a:solidFill>
+                  <a:srgbClr val="E8A838"/>
+                </a:solidFill>
+                <a:latin typeface="Calibri" pitchFamily="34" charset="0"/>
+                <a:ea typeface="Calibri" pitchFamily="34" charset="-122"/>
+                <a:cs typeface="Calibri" pitchFamily="34" charset="-120"/>
+              </a:rPr>
+              <a:t>A modest ceiling</a:t>
+            </a:r>
+            <a:endParaRPr lang="en-US" sz="1300" dirty="0"/>
+          </a:p>
+        </p:txBody>
+      </p:sp>
+      <p:sp>
+        <p:nvSpPr>
+          <p:cNvPr id="11" name="Text 9"/>
+          <p:cNvSpPr/>
+          <p:nvPr/>
+        </p:nvSpPr>
+        <p:spPr>
+          <a:xfrm>
+            <a:off x="3410712" y="2834640"/>
+            <a:ext cx="2377440" cy="1828800"/>
+          </a:xfrm>
+          <a:prstGeom prst="rect">
+            <a:avLst/>
+          </a:prstGeom>
+          <a:noFill/>
+          <a:ln/>
+        </p:spPr>
+        <p:txBody>
+          <a:bodyPr wrap="square" lIns="0" tIns="0" rIns="0" bIns="0" rtlCol="0" anchor="t"/>
+          <a:lstStyle/>
+          <a:p>
+            <a:pPr algn="l" indent="0" marL="0">
+              <a:buNone/>
+            </a:pPr>
+            <a:r>
+              <a:rPr lang="en-US" sz="1150" dirty="0">
+                <a:solidFill>
+                  <a:srgbClr val="CADCFC"/>
+                </a:solidFill>
+                <a:latin typeface="Calibri" pitchFamily="34" charset="0"/>
+                <a:ea typeface="Calibri" pitchFamily="34" charset="-122"/>
+                <a:cs typeface="Calibri" pitchFamily="34" charset="-120"/>
+              </a:rPr>
+              <a:t>Weighted F1 0.54, accuracy 55%. 'Stayed the same' is hardest (F1 0.36). Use it to prioritise groups, not to judge individuals.</a:t>
+            </a:r>
+            <a:endParaRPr lang="en-US" sz="1150" dirty="0"/>
+          </a:p>
+        </p:txBody>
+      </p:sp>
+      <p:sp>
+        <p:nvSpPr>
+          <p:cNvPr id="12" name="Shape 10"/>
+          <p:cNvSpPr/>
+          <p:nvPr/>
+        </p:nvSpPr>
+        <p:spPr>
+          <a:xfrm>
+            <a:off x="6172200" y="1600200"/>
+            <a:ext cx="2697480" cy="3246120"/>
+          </a:xfrm>
+          <a:prstGeom prst="roundRect">
+            <a:avLst>
+              <a:gd name="adj" fmla="val 3390"/>
+            </a:avLst>
+          </a:prstGeom>
+          <a:solidFill>
+            <a:srgbClr val="243558"/>
+          </a:solidFill>
+          <a:ln/>
+          <a:effectLst>
+            <a:outerShdw sx="100000" sy="100000" kx="0" ky="0" algn="bl" rotWithShape="0" blurRad="101600" dist="38100" dir="2700000">
+              <a:srgbClr val="000000">
+                <a:alpha val="12000"/>
+              </a:srgbClr>
+            </a:outerShdw>
+          </a:effectLst>
+        </p:spPr>
+      </p:sp>
+      <p:sp>
+        <p:nvSpPr>
+          <p:cNvPr id="13" name="Text 11"/>
+          <p:cNvSpPr/>
+          <p:nvPr/>
+        </p:nvSpPr>
+        <p:spPr>
+          <a:xfrm>
+            <a:off x="6309360" y="1737360"/>
+            <a:ext cx="2423160" cy="502920"/>
+          </a:xfrm>
+          <a:prstGeom prst="rect">
+            <a:avLst/>
+          </a:prstGeom>
+          <a:noFill/>
+          <a:ln/>
+        </p:spPr>
+        <p:txBody>
+          <a:bodyPr wrap="square" lIns="0" tIns="0" rIns="0" bIns="0" rtlCol="0" anchor="ctr"/>
+          <a:lstStyle/>
+          <a:p>
+            <a:pPr algn="ctr" indent="0" marL="0">
+              <a:buNone/>
+            </a:pPr>
+            <a:r>
+              <a:rPr lang="en-US" sz="2600" dirty="0">
+                <a:solidFill>
+                  <a:srgbClr val="000000"/>
+                </a:solidFill>
+              </a:rPr>
+              <a:t>⚖</a:t>
+            </a:r>
+            <a:endParaRPr lang="en-US" sz="2600" dirty="0"/>
+          </a:p>
+        </p:txBody>
+      </p:sp>
+      <p:sp>
+        <p:nvSpPr>
+          <p:cNvPr id="14" name="Text 12"/>
+          <p:cNvSpPr/>
+          <p:nvPr/>
+        </p:nvSpPr>
+        <p:spPr>
+          <a:xfrm>
+            <a:off x="6309360" y="2286000"/>
+            <a:ext cx="2423160" cy="502920"/>
+          </a:xfrm>
+          <a:prstGeom prst="rect">
+            <a:avLst/>
+          </a:prstGeom>
+          <a:noFill/>
+          <a:ln/>
+        </p:spPr>
+        <p:txBody>
+          <a:bodyPr wrap="square" lIns="0" tIns="0" rIns="0" bIns="0" rtlCol="0" anchor="ctr"/>
+          <a:lstStyle/>
+          <a:p>
+            <a:pPr algn="ctr" indent="0" marL="0">
+              <a:buNone/>
+            </a:pPr>
+            <a:r>
+              <a:rPr lang="en-US" sz="1300" b="1" dirty="0">
+                <a:solidFill>
+                  <a:srgbClr val="E8A838"/>
+                </a:solidFill>
+                <a:latin typeface="Calibri" pitchFamily="34" charset="0"/>
+                <a:ea typeface="Calibri" pitchFamily="34" charset="-122"/>
+                <a:cs typeface="Calibri" pitchFamily="34" charset="-120"/>
+              </a:rPr>
+              <a:t>Sample, not nation</a:t>
+            </a:r>
+            <a:endParaRPr lang="en-US" sz="1300" dirty="0"/>
+          </a:p>
+        </p:txBody>
+      </p:sp>
+      <p:sp>
+        <p:nvSpPr>
+          <p:cNvPr id="15" name="Text 13"/>
+          <p:cNvSpPr/>
+          <p:nvPr/>
+        </p:nvSpPr>
+        <p:spPr>
+          <a:xfrm>
+            <a:off x="6336792" y="2834640"/>
+            <a:ext cx="2377440" cy="1828800"/>
+          </a:xfrm>
+          <a:prstGeom prst="rect">
+            <a:avLst/>
+          </a:prstGeom>
+          <a:noFill/>
+          <a:ln/>
+        </p:spPr>
+        <p:txBody>
+          <a:bodyPr wrap="square" lIns="0" tIns="0" rIns="0" bIns="0" rtlCol="0" anchor="t"/>
+          <a:lstStyle/>
+          <a:p>
+            <a:pPr algn="l" indent="0" marL="0">
+              <a:buNone/>
+            </a:pPr>
+            <a:r>
+              <a:rPr lang="en-US" sz="1150" dirty="0">
+                <a:solidFill>
+                  <a:srgbClr val="CADCFC"/>
+                </a:solidFill>
+                <a:latin typeface="Calibri" pitchFamily="34" charset="0"/>
+                <a:ea typeface="Calibri" pitchFamily="34" charset="-122"/>
+                <a:cs typeface="Calibri" pitchFamily="34" charset="-120"/>
+              </a:rPr>
+              <a:t>No survey weights are in this file, so figures describe the sample (n = 20,866). County rates rest on 162-637 people each (about +/-4 points).</a:t>
+            </a:r>
+            <a:endParaRPr lang="en-US" sz="1150" dirty="0"/>
+          </a:p>
+        </p:txBody>
+      </p:sp>
+      <p:sp>
+        <p:nvSpPr>
+          <p:cNvPr id="16" name="Shape 14"/>
+          <p:cNvSpPr/>
+          <p:nvPr/>
+        </p:nvSpPr>
+        <p:spPr>
+          <a:xfrm>
+            <a:off x="320040" y="4572000"/>
+            <a:ext cx="8503920" cy="438912"/>
+          </a:xfrm>
+          <a:prstGeom prst="roundRect">
+            <a:avLst>
+              <a:gd name="adj" fmla="val 12500"/>
+            </a:avLst>
+          </a:prstGeom>
+          <a:solidFill>
+            <a:srgbClr val="243558"/>
+          </a:solidFill>
+          <a:ln/>
+        </p:spPr>
+      </p:sp>
+      <p:sp>
+        <p:nvSpPr>
+          <p:cNvPr id="17" name="Text 15"/>
+          <p:cNvSpPr/>
+          <p:nvPr/>
+        </p:nvSpPr>
+        <p:spPr>
+          <a:xfrm>
+            <a:off x="502920" y="4608576"/>
+            <a:ext cx="8321040" cy="347472"/>
+          </a:xfrm>
+          <a:prstGeom prst="rect">
+            <a:avLst/>
+          </a:prstGeom>
+          <a:noFill/>
+          <a:ln/>
+        </p:spPr>
+        <p:txBody>
+          <a:bodyPr wrap="square" lIns="0" tIns="0" rIns="0" bIns="0" rtlCol="0" anchor="ctr"/>
+          <a:lstStyle/>
+          <a:p>
+            <a:pPr indent="0" marL="0">
+              <a:buNone/>
+            </a:pPr>
+            <a:r>
+              <a:rPr lang="en-US" sz="1050" i="1" dirty="0">
+                <a:solidFill>
+                  <a:srgbClr val="E8A838"/>
+                </a:solidFill>
+                <a:latin typeface="Calibri" pitchFamily="34" charset="0"/>
+                <a:ea typeface="Calibri" pitchFamily="34" charset="-122"/>
+                <a:cs typeface="Calibri" pitchFamily="34" charset="-120"/>
+              </a:rPr>
+              <a:t>Next steps: apply survey weights, add panel data, and test fairness across counties, age groups and sex.</a:t>
+            </a:r>
+            <a:endParaRPr lang="en-US" sz="1050" dirty="0"/>
           </a:p>
         </p:txBody>
       </p:sp>
